--- a/mon/vat_li/slide/lop12/Slide_VATLY12_Bai3_NhietDo_ThangDoNhietDo_T5-6.pptx
+++ b/mon/vat_li/slide/lop12/Slide_VATLY12_Bai3_NhietDo_ThangDoNhietDo_T5-6.pptx
@@ -3279,7 +3279,7 @@
                 </a:solidFill>
                 <a:latin typeface="Calibri"/>
               </a:rPr>
-              <a:t>GV: TRƯƠNG TỬ TRANG  –  Tổ TOÁN  –  Trường THPT Vĩnh Thạnh</a:t>
+              <a:t>GV: TTT  –  Tổ TOÁN  –  Trường THPT</a:t>
             </a:r>
           </a:p>
         </p:txBody>
@@ -4528,28 +4528,2119 @@
       </p:sp>
       <p:pic>
         <p:nvPicPr>
-          <p:cNvPr id="3" name="Picture 2" descr="SoDoTuDuy_VATLY12_Bai3_NhietDo_ThangDoNhietDo_T5-6.png"/>
+          <p:cNvPr id="3" name="Picture 2" descr="_qr_ly_cc_bai3_k12.html.png"/>
           <p:cNvPicPr>
             <a:picLocks noChangeAspect="1"/>
           </p:cNvPicPr>
           <p:nvPr/>
         </p:nvPicPr>
         <p:blipFill>
-          <a:blip r:embed="rId2"/>
+          <a:blip r:embed="rId3"/>
           <a:stretch>
             <a:fillRect/>
           </a:stretch>
         </p:blipFill>
         <p:spPr>
           <a:xfrm>
-            <a:off x="457200" y="868680"/>
-            <a:ext cx="11247120" cy="5760720"/>
+            <a:off x="9674352" y="1463040"/>
+            <a:ext cx="2286000" cy="2286000"/>
           </a:xfrm>
           <a:prstGeom prst="rect">
             <a:avLst/>
           </a:prstGeom>
         </p:spPr>
       </p:pic>
+      <p:cxnSp>
+        <p:nvCxnSpPr>
+          <p:cNvPr id="4" name="Connector 3"/>
+          <p:cNvCxnSpPr/>
+          <p:nvPr/>
+        </p:nvCxnSpPr>
+        <p:spPr>
+          <a:xfrm flipH="1" flipV="1">
+            <a:off x="3508857" y="2670962"/>
+            <a:ext cx="1351179" cy="1283818"/>
+          </a:xfrm>
+          <a:prstGeom prst="line">
+            <a:avLst/>
+          </a:prstGeom>
+          <a:ln w="44450">
+            <a:solidFill>
+              <a:srgbClr val="548235"/>
+            </a:solidFill>
+          </a:ln>
+        </p:spPr>
+        <p:style>
+          <a:lnRef idx="2">
+            <a:schemeClr val="accent1"/>
+          </a:lnRef>
+          <a:fillRef idx="0">
+            <a:schemeClr val="accent1"/>
+          </a:fillRef>
+          <a:effectRef idx="1">
+            <a:schemeClr val="accent1"/>
+          </a:effectRef>
+          <a:fontRef idx="minor">
+            <a:schemeClr val="tx1"/>
+          </a:fontRef>
+        </p:style>
+      </p:cxnSp>
+      <p:cxnSp>
+        <p:nvCxnSpPr>
+          <p:cNvPr id="5" name="Connector 4"/>
+          <p:cNvCxnSpPr/>
+          <p:nvPr/>
+        </p:nvCxnSpPr>
+        <p:spPr>
+          <a:xfrm flipH="1" flipV="1">
+            <a:off x="2326162" y="1830405"/>
+            <a:ext cx="1182695" cy="840557"/>
+          </a:xfrm>
+          <a:prstGeom prst="line">
+            <a:avLst/>
+          </a:prstGeom>
+          <a:ln w="15875">
+            <a:solidFill>
+              <a:srgbClr val="548235"/>
+            </a:solidFill>
+          </a:ln>
+        </p:spPr>
+        <p:style>
+          <a:lnRef idx="2">
+            <a:schemeClr val="accent1"/>
+          </a:lnRef>
+          <a:fillRef idx="0">
+            <a:schemeClr val="accent1"/>
+          </a:fillRef>
+          <a:effectRef idx="1">
+            <a:schemeClr val="accent1"/>
+          </a:effectRef>
+          <a:fontRef idx="minor">
+            <a:schemeClr val="tx1"/>
+          </a:fontRef>
+        </p:style>
+      </p:cxnSp>
+      <p:sp>
+        <p:nvSpPr>
+          <p:cNvPr id="6" name="Rounded Rectangle 5"/>
+          <p:cNvSpPr/>
+          <p:nvPr/>
+        </p:nvSpPr>
+        <p:spPr>
+          <a:xfrm>
+            <a:off x="638017" y="1554093"/>
+            <a:ext cx="1688144" cy="552622"/>
+          </a:xfrm>
+          <a:prstGeom prst="roundRect">
+            <a:avLst>
+              <a:gd name="adj" fmla="val 50000"/>
+            </a:avLst>
+          </a:prstGeom>
+          <a:solidFill>
+            <a:srgbClr val="EDF5E8"/>
+          </a:solidFill>
+          <a:ln w="15875">
+            <a:solidFill>
+              <a:srgbClr val="548235"/>
+            </a:solidFill>
+          </a:ln>
+          <a:effectLst/>
+        </p:spPr>
+        <p:style>
+          <a:lnRef idx="1">
+            <a:schemeClr val="accent1"/>
+          </a:lnRef>
+          <a:fillRef idx="3">
+            <a:schemeClr val="accent1"/>
+          </a:fillRef>
+          <a:effectRef idx="2">
+            <a:schemeClr val="accent1"/>
+          </a:effectRef>
+          <a:fontRef idx="minor">
+            <a:schemeClr val="lt1"/>
+          </a:fontRef>
+        </p:style>
+        <p:txBody>
+          <a:bodyPr rtlCol="0" anchor="ctr" wrap="none" lIns="64000" rIns="64000" tIns="25400" bIns="25400"/>
+          <a:lstStyle/>
+          <a:p>
+            <a:pPr algn="ctr"/>
+            <a:r>
+              <a:rPr sz="1300" b="0">
+                <a:solidFill>
+                  <a:srgbClr val="000000"/>
+                </a:solidFill>
+                <a:latin typeface="Calibri"/>
+              </a:rPr>
+              <a:t>Đặc trưng mức độ</a:t>
+            </a:r>
+          </a:p>
+          <a:p>
+            <a:pPr algn="ctr"/>
+            <a:r>
+              <a:rPr sz="1300" b="0">
+                <a:solidFill>
+                  <a:srgbClr val="000000"/>
+                </a:solidFill>
+                <a:latin typeface="Calibri"/>
+              </a:rPr>
+              <a:t>nóng lạnh của vật</a:t>
+            </a:r>
+          </a:p>
+        </p:txBody>
+      </p:sp>
+      <p:cxnSp>
+        <p:nvCxnSpPr>
+          <p:cNvPr id="7" name="Connector 6"/>
+          <p:cNvCxnSpPr/>
+          <p:nvPr/>
+        </p:nvCxnSpPr>
+        <p:spPr>
+          <a:xfrm flipH="1" flipV="1">
+            <a:off x="2111532" y="2457917"/>
+            <a:ext cx="1397325" cy="213045"/>
+          </a:xfrm>
+          <a:prstGeom prst="line">
+            <a:avLst/>
+          </a:prstGeom>
+          <a:ln w="15875">
+            <a:solidFill>
+              <a:srgbClr val="548235"/>
+            </a:solidFill>
+          </a:ln>
+        </p:spPr>
+        <p:style>
+          <a:lnRef idx="2">
+            <a:schemeClr val="accent1"/>
+          </a:lnRef>
+          <a:fillRef idx="0">
+            <a:schemeClr val="accent1"/>
+          </a:fillRef>
+          <a:effectRef idx="1">
+            <a:schemeClr val="accent1"/>
+          </a:effectRef>
+          <a:fontRef idx="minor">
+            <a:schemeClr val="tx1"/>
+          </a:fontRef>
+        </p:style>
+      </p:cxnSp>
+      <p:sp>
+        <p:nvSpPr>
+          <p:cNvPr id="8" name="Rounded Rectangle 7"/>
+          <p:cNvSpPr/>
+          <p:nvPr/>
+        </p:nvSpPr>
+        <p:spPr>
+          <a:xfrm>
+            <a:off x="852647" y="2181606"/>
+            <a:ext cx="1258884" cy="552622"/>
+          </a:xfrm>
+          <a:prstGeom prst="roundRect">
+            <a:avLst>
+              <a:gd name="adj" fmla="val 50000"/>
+            </a:avLst>
+          </a:prstGeom>
+          <a:solidFill>
+            <a:srgbClr val="EDF5E8"/>
+          </a:solidFill>
+          <a:ln w="15875">
+            <a:solidFill>
+              <a:srgbClr val="548235"/>
+            </a:solidFill>
+          </a:ln>
+          <a:effectLst/>
+        </p:spPr>
+        <p:style>
+          <a:lnRef idx="1">
+            <a:schemeClr val="accent1"/>
+          </a:lnRef>
+          <a:fillRef idx="3">
+            <a:schemeClr val="accent1"/>
+          </a:fillRef>
+          <a:effectRef idx="2">
+            <a:schemeClr val="accent1"/>
+          </a:effectRef>
+          <a:fontRef idx="minor">
+            <a:schemeClr val="lt1"/>
+          </a:fontRef>
+        </p:style>
+        <p:txBody>
+          <a:bodyPr rtlCol="0" anchor="ctr" wrap="none" lIns="64000" rIns="64000" tIns="25400" bIns="25400"/>
+          <a:lstStyle/>
+          <a:p>
+            <a:pPr algn="ctr"/>
+            <a:r>
+              <a:rPr sz="1300" b="0">
+                <a:solidFill>
+                  <a:srgbClr val="000000"/>
+                </a:solidFill>
+                <a:latin typeface="Calibri"/>
+              </a:rPr>
+              <a:t>Tỉ lệ với ĐN</a:t>
+            </a:r>
+          </a:p>
+          <a:p>
+            <a:pPr algn="ctr"/>
+            <a:r>
+              <a:rPr sz="1300" b="0">
+                <a:solidFill>
+                  <a:srgbClr val="000000"/>
+                </a:solidFill>
+                <a:latin typeface="Calibri"/>
+              </a:rPr>
+              <a:t>TB PT</a:t>
+            </a:r>
+          </a:p>
+        </p:txBody>
+      </p:sp>
+      <p:cxnSp>
+        <p:nvCxnSpPr>
+          <p:cNvPr id="9" name="Connector 8"/>
+          <p:cNvCxnSpPr/>
+          <p:nvPr/>
+        </p:nvCxnSpPr>
+        <p:spPr>
+          <a:xfrm flipH="1">
+            <a:off x="2369088" y="2670962"/>
+            <a:ext cx="1139769" cy="414467"/>
+          </a:xfrm>
+          <a:prstGeom prst="line">
+            <a:avLst/>
+          </a:prstGeom>
+          <a:ln w="15875">
+            <a:solidFill>
+              <a:srgbClr val="548235"/>
+            </a:solidFill>
+          </a:ln>
+        </p:spPr>
+        <p:style>
+          <a:lnRef idx="2">
+            <a:schemeClr val="accent1"/>
+          </a:lnRef>
+          <a:fillRef idx="0">
+            <a:schemeClr val="accent1"/>
+          </a:fillRef>
+          <a:effectRef idx="1">
+            <a:schemeClr val="accent1"/>
+          </a:effectRef>
+          <a:fontRef idx="minor">
+            <a:schemeClr val="tx1"/>
+          </a:fontRef>
+        </p:style>
+      </p:cxnSp>
+      <p:sp>
+        <p:nvSpPr>
+          <p:cNvPr id="10" name="Rounded Rectangle 9"/>
+          <p:cNvSpPr/>
+          <p:nvPr/>
+        </p:nvSpPr>
+        <p:spPr>
+          <a:xfrm>
+            <a:off x="595091" y="2809118"/>
+            <a:ext cx="1773996" cy="552622"/>
+          </a:xfrm>
+          <a:prstGeom prst="roundRect">
+            <a:avLst>
+              <a:gd name="adj" fmla="val 50000"/>
+            </a:avLst>
+          </a:prstGeom>
+          <a:solidFill>
+            <a:srgbClr val="EDF5E8"/>
+          </a:solidFill>
+          <a:ln w="15875">
+            <a:solidFill>
+              <a:srgbClr val="548235"/>
+            </a:solidFill>
+          </a:ln>
+          <a:effectLst/>
+        </p:spPr>
+        <p:style>
+          <a:lnRef idx="1">
+            <a:schemeClr val="accent1"/>
+          </a:lnRef>
+          <a:fillRef idx="3">
+            <a:schemeClr val="accent1"/>
+          </a:fillRef>
+          <a:effectRef idx="2">
+            <a:schemeClr val="accent1"/>
+          </a:effectRef>
+          <a:fontRef idx="minor">
+            <a:schemeClr val="lt1"/>
+          </a:fontRef>
+        </p:style>
+        <p:txBody>
+          <a:bodyPr rtlCol="0" anchor="ctr" wrap="none" lIns="64000" rIns="64000" tIns="25400" bIns="25400"/>
+          <a:lstStyle/>
+          <a:p>
+            <a:pPr algn="ctr"/>
+            <a:r>
+              <a:rPr sz="1300" b="0">
+                <a:solidFill>
+                  <a:srgbClr val="000000"/>
+                </a:solidFill>
+                <a:latin typeface="Calibri"/>
+              </a:rPr>
+              <a:t>Cân bằng nhiệt: T₁</a:t>
+            </a:r>
+          </a:p>
+          <a:p>
+            <a:pPr algn="ctr"/>
+            <a:r>
+              <a:rPr sz="1300" b="0">
+                <a:solidFill>
+                  <a:srgbClr val="000000"/>
+                </a:solidFill>
+                <a:latin typeface="Calibri"/>
+              </a:rPr>
+              <a:t>= T₂</a:t>
+            </a:r>
+          </a:p>
+        </p:txBody>
+      </p:sp>
+      <p:cxnSp>
+        <p:nvCxnSpPr>
+          <p:cNvPr id="11" name="Connector 10"/>
+          <p:cNvCxnSpPr/>
+          <p:nvPr/>
+        </p:nvCxnSpPr>
+        <p:spPr>
+          <a:xfrm flipH="1">
+            <a:off x="2283236" y="2670962"/>
+            <a:ext cx="1225621" cy="941268"/>
+          </a:xfrm>
+          <a:prstGeom prst="line">
+            <a:avLst/>
+          </a:prstGeom>
+          <a:ln w="15875">
+            <a:solidFill>
+              <a:srgbClr val="548235"/>
+            </a:solidFill>
+          </a:ln>
+        </p:spPr>
+        <p:style>
+          <a:lnRef idx="2">
+            <a:schemeClr val="accent1"/>
+          </a:lnRef>
+          <a:fillRef idx="0">
+            <a:schemeClr val="accent1"/>
+          </a:fillRef>
+          <a:effectRef idx="1">
+            <a:schemeClr val="accent1"/>
+          </a:effectRef>
+          <a:fontRef idx="minor">
+            <a:schemeClr val="tx1"/>
+          </a:fontRef>
+        </p:style>
+      </p:cxnSp>
+      <p:sp>
+        <p:nvSpPr>
+          <p:cNvPr id="12" name="Rounded Rectangle 11"/>
+          <p:cNvSpPr/>
+          <p:nvPr/>
+        </p:nvSpPr>
+        <p:spPr>
+          <a:xfrm>
+            <a:off x="680943" y="3436630"/>
+            <a:ext cx="1602292" cy="351200"/>
+          </a:xfrm>
+          <a:prstGeom prst="roundRect">
+            <a:avLst>
+              <a:gd name="adj" fmla="val 50000"/>
+            </a:avLst>
+          </a:prstGeom>
+          <a:solidFill>
+            <a:srgbClr val="EDF5E8"/>
+          </a:solidFill>
+          <a:ln w="15875">
+            <a:solidFill>
+              <a:srgbClr val="548235"/>
+            </a:solidFill>
+          </a:ln>
+          <a:effectLst/>
+        </p:spPr>
+        <p:style>
+          <a:lnRef idx="1">
+            <a:schemeClr val="accent1"/>
+          </a:lnRef>
+          <a:fillRef idx="3">
+            <a:schemeClr val="accent1"/>
+          </a:fillRef>
+          <a:effectRef idx="2">
+            <a:schemeClr val="accent1"/>
+          </a:effectRef>
+          <a:fontRef idx="minor">
+            <a:schemeClr val="lt1"/>
+          </a:fontRef>
+        </p:style>
+        <p:txBody>
+          <a:bodyPr rtlCol="0" anchor="ctr" wrap="none" lIns="64000" rIns="64000" tIns="25400" bIns="25400"/>
+          <a:lstStyle/>
+          <a:p>
+            <a:pPr algn="ctr"/>
+            <a:r>
+              <a:rPr sz="1300" b="0">
+                <a:solidFill>
+                  <a:srgbClr val="000000"/>
+                </a:solidFill>
+                <a:latin typeface="Calibri"/>
+              </a:rPr>
+              <a:t>Đo bằng nhiệt kế</a:t>
+            </a:r>
+          </a:p>
+        </p:txBody>
+      </p:sp>
+      <p:sp>
+        <p:nvSpPr>
+          <p:cNvPr id="13" name="Oval 12"/>
+          <p:cNvSpPr/>
+          <p:nvPr/>
+        </p:nvSpPr>
+        <p:spPr>
+          <a:xfrm>
+            <a:off x="2701107" y="2259078"/>
+            <a:ext cx="1615500" cy="823767"/>
+          </a:xfrm>
+          <a:prstGeom prst="ellipse">
+            <a:avLst/>
+          </a:prstGeom>
+          <a:solidFill>
+            <a:srgbClr val="E2EFDA"/>
+          </a:solidFill>
+          <a:ln w="31750">
+            <a:solidFill>
+              <a:srgbClr val="375623"/>
+            </a:solidFill>
+          </a:ln>
+          <a:effectLst/>
+        </p:spPr>
+        <p:style>
+          <a:lnRef idx="1">
+            <a:schemeClr val="accent1"/>
+          </a:lnRef>
+          <a:fillRef idx="3">
+            <a:schemeClr val="accent1"/>
+          </a:fillRef>
+          <a:effectRef idx="2">
+            <a:schemeClr val="accent1"/>
+          </a:effectRef>
+          <a:fontRef idx="minor">
+            <a:schemeClr val="lt1"/>
+          </a:fontRef>
+        </p:style>
+        <p:txBody>
+          <a:bodyPr rtlCol="0" anchor="ctr" wrap="none" lIns="64000" rIns="64000" tIns="25400" bIns="25400"/>
+          <a:lstStyle/>
+          <a:p>
+            <a:pPr algn="ctr"/>
+            <a:r>
+              <a:rPr sz="1500" b="1">
+                <a:solidFill>
+                  <a:srgbClr val="000000"/>
+                </a:solidFill>
+                <a:latin typeface="Calibri"/>
+              </a:rPr>
+              <a:t>① Nhiệt độ</a:t>
+            </a:r>
+          </a:p>
+          <a:p>
+            <a:pPr algn="ctr"/>
+            <a:r>
+              <a:rPr sz="1500" b="1">
+                <a:solidFill>
+                  <a:srgbClr val="000000"/>
+                </a:solidFill>
+                <a:latin typeface="Calibri"/>
+              </a:rPr>
+              <a:t>là gì</a:t>
+            </a:r>
+          </a:p>
+        </p:txBody>
+      </p:sp>
+      <p:cxnSp>
+        <p:nvCxnSpPr>
+          <p:cNvPr id="14" name="Connector 13"/>
+          <p:cNvCxnSpPr/>
+          <p:nvPr/>
+        </p:nvCxnSpPr>
+        <p:spPr>
+          <a:xfrm flipV="1">
+            <a:off x="4860036" y="2670962"/>
+            <a:ext cx="1351178" cy="1283818"/>
+          </a:xfrm>
+          <a:prstGeom prst="line">
+            <a:avLst/>
+          </a:prstGeom>
+          <a:ln w="44450">
+            <a:solidFill>
+              <a:srgbClr val="BF8F00"/>
+            </a:solidFill>
+          </a:ln>
+        </p:spPr>
+        <p:style>
+          <a:lnRef idx="2">
+            <a:schemeClr val="accent1"/>
+          </a:lnRef>
+          <a:fillRef idx="0">
+            <a:schemeClr val="accent1"/>
+          </a:fillRef>
+          <a:effectRef idx="1">
+            <a:schemeClr val="accent1"/>
+          </a:effectRef>
+          <a:fontRef idx="minor">
+            <a:schemeClr val="tx1"/>
+          </a:fontRef>
+        </p:style>
+      </p:cxnSp>
+      <p:cxnSp>
+        <p:nvCxnSpPr>
+          <p:cNvPr id="15" name="Connector 14"/>
+          <p:cNvCxnSpPr/>
+          <p:nvPr/>
+        </p:nvCxnSpPr>
+        <p:spPr>
+          <a:xfrm flipV="1">
+            <a:off x="6211214" y="2031827"/>
+            <a:ext cx="1225621" cy="639135"/>
+          </a:xfrm>
+          <a:prstGeom prst="line">
+            <a:avLst/>
+          </a:prstGeom>
+          <a:ln w="15875">
+            <a:solidFill>
+              <a:srgbClr val="BF8F00"/>
+            </a:solidFill>
+          </a:ln>
+        </p:spPr>
+        <p:style>
+          <a:lnRef idx="2">
+            <a:schemeClr val="accent1"/>
+          </a:lnRef>
+          <a:fillRef idx="0">
+            <a:schemeClr val="accent1"/>
+          </a:fillRef>
+          <a:effectRef idx="1">
+            <a:schemeClr val="accent1"/>
+          </a:effectRef>
+          <a:fontRef idx="minor">
+            <a:schemeClr val="tx1"/>
+          </a:fontRef>
+        </p:style>
+      </p:cxnSp>
+      <p:sp>
+        <p:nvSpPr>
+          <p:cNvPr id="16" name="Rounded Rectangle 15"/>
+          <p:cNvSpPr/>
+          <p:nvPr/>
+        </p:nvSpPr>
+        <p:spPr>
+          <a:xfrm>
+            <a:off x="7436835" y="1654804"/>
+            <a:ext cx="1602292" cy="754044"/>
+          </a:xfrm>
+          <a:prstGeom prst="roundRect">
+            <a:avLst>
+              <a:gd name="adj" fmla="val 50000"/>
+            </a:avLst>
+          </a:prstGeom>
+          <a:solidFill>
+            <a:srgbClr val="FFF8E1"/>
+          </a:solidFill>
+          <a:ln w="15875">
+            <a:solidFill>
+              <a:srgbClr val="BF8F00"/>
+            </a:solidFill>
+          </a:ln>
+          <a:effectLst/>
+        </p:spPr>
+        <p:style>
+          <a:lnRef idx="1">
+            <a:schemeClr val="accent1"/>
+          </a:lnRef>
+          <a:fillRef idx="3">
+            <a:schemeClr val="accent1"/>
+          </a:fillRef>
+          <a:effectRef idx="2">
+            <a:schemeClr val="accent1"/>
+          </a:effectRef>
+          <a:fontRef idx="minor">
+            <a:schemeClr val="lt1"/>
+          </a:fontRef>
+        </p:style>
+        <p:txBody>
+          <a:bodyPr rtlCol="0" anchor="ctr" wrap="none" lIns="64000" rIns="64000" tIns="25400" bIns="25400"/>
+          <a:lstStyle/>
+          <a:p>
+            <a:pPr algn="ctr"/>
+            <a:r>
+              <a:rPr sz="1300" b="0">
+                <a:solidFill>
+                  <a:srgbClr val="000000"/>
+                </a:solidFill>
+                <a:latin typeface="Calibri"/>
+              </a:rPr>
+              <a:t>Điểm 0°C: đá tan</a:t>
+            </a:r>
+          </a:p>
+          <a:p>
+            <a:pPr algn="ctr"/>
+            <a:r>
+              <a:rPr sz="1300" b="0">
+                <a:solidFill>
+                  <a:srgbClr val="000000"/>
+                </a:solidFill>
+                <a:latin typeface="Calibri"/>
+              </a:rPr>
+              <a:t>ở p = 1</a:t>
+            </a:r>
+          </a:p>
+          <a:p>
+            <a:pPr algn="ctr"/>
+            <a:r>
+              <a:rPr sz="1300" b="0">
+                <a:solidFill>
+                  <a:srgbClr val="000000"/>
+                </a:solidFill>
+                <a:latin typeface="Calibri"/>
+              </a:rPr>
+              <a:t>atm</a:t>
+            </a:r>
+          </a:p>
+        </p:txBody>
+      </p:sp>
+      <p:cxnSp>
+        <p:nvCxnSpPr>
+          <p:cNvPr id="17" name="Connector 16"/>
+          <p:cNvCxnSpPr/>
+          <p:nvPr/>
+        </p:nvCxnSpPr>
+        <p:spPr>
+          <a:xfrm flipV="1">
+            <a:off x="6211214" y="2659339"/>
+            <a:ext cx="1053917" cy="11623"/>
+          </a:xfrm>
+          <a:prstGeom prst="line">
+            <a:avLst/>
+          </a:prstGeom>
+          <a:ln w="15875">
+            <a:solidFill>
+              <a:srgbClr val="BF8F00"/>
+            </a:solidFill>
+          </a:ln>
+        </p:spPr>
+        <p:style>
+          <a:lnRef idx="2">
+            <a:schemeClr val="accent1"/>
+          </a:lnRef>
+          <a:fillRef idx="0">
+            <a:schemeClr val="accent1"/>
+          </a:fillRef>
+          <a:effectRef idx="1">
+            <a:schemeClr val="accent1"/>
+          </a:effectRef>
+          <a:fontRef idx="minor">
+            <a:schemeClr val="tx1"/>
+          </a:fontRef>
+        </p:style>
+      </p:cxnSp>
+      <p:sp>
+        <p:nvSpPr>
+          <p:cNvPr id="18" name="Rounded Rectangle 17"/>
+          <p:cNvSpPr/>
+          <p:nvPr/>
+        </p:nvSpPr>
+        <p:spPr>
+          <a:xfrm>
+            <a:off x="7265131" y="2483739"/>
+            <a:ext cx="1945700" cy="351200"/>
+          </a:xfrm>
+          <a:prstGeom prst="roundRect">
+            <a:avLst>
+              <a:gd name="adj" fmla="val 50000"/>
+            </a:avLst>
+          </a:prstGeom>
+          <a:solidFill>
+            <a:srgbClr val="FFF8E1"/>
+          </a:solidFill>
+          <a:ln w="15875">
+            <a:solidFill>
+              <a:srgbClr val="BF8F00"/>
+            </a:solidFill>
+          </a:ln>
+          <a:effectLst/>
+        </p:spPr>
+        <p:style>
+          <a:lnRef idx="1">
+            <a:schemeClr val="accent1"/>
+          </a:lnRef>
+          <a:fillRef idx="3">
+            <a:schemeClr val="accent1"/>
+          </a:fillRef>
+          <a:effectRef idx="2">
+            <a:schemeClr val="accent1"/>
+          </a:effectRef>
+          <a:fontRef idx="minor">
+            <a:schemeClr val="lt1"/>
+          </a:fontRef>
+        </p:style>
+        <p:txBody>
+          <a:bodyPr rtlCol="0" anchor="ctr" wrap="none" lIns="64000" rIns="64000" tIns="25400" bIns="25400"/>
+          <a:lstStyle/>
+          <a:p>
+            <a:pPr algn="ctr"/>
+            <a:r>
+              <a:rPr sz="1300" b="0">
+                <a:solidFill>
+                  <a:srgbClr val="000000"/>
+                </a:solidFill>
+                <a:latin typeface="Calibri"/>
+              </a:rPr>
+              <a:t>Điểm 100°C: nước sôi</a:t>
+            </a:r>
+          </a:p>
+        </p:txBody>
+      </p:sp>
+      <p:cxnSp>
+        <p:nvCxnSpPr>
+          <p:cNvPr id="19" name="Connector 18"/>
+          <p:cNvCxnSpPr/>
+          <p:nvPr/>
+        </p:nvCxnSpPr>
+        <p:spPr>
+          <a:xfrm>
+            <a:off x="6211214" y="2670962"/>
+            <a:ext cx="1096843" cy="414467"/>
+          </a:xfrm>
+          <a:prstGeom prst="line">
+            <a:avLst/>
+          </a:prstGeom>
+          <a:ln w="15875">
+            <a:solidFill>
+              <a:srgbClr val="BF8F00"/>
+            </a:solidFill>
+          </a:ln>
+        </p:spPr>
+        <p:style>
+          <a:lnRef idx="2">
+            <a:schemeClr val="accent1"/>
+          </a:lnRef>
+          <a:fillRef idx="0">
+            <a:schemeClr val="accent1"/>
+          </a:fillRef>
+          <a:effectRef idx="1">
+            <a:schemeClr val="accent1"/>
+          </a:effectRef>
+          <a:fontRef idx="minor">
+            <a:schemeClr val="tx1"/>
+          </a:fontRef>
+        </p:style>
+      </p:cxnSp>
+      <p:sp>
+        <p:nvSpPr>
+          <p:cNvPr id="20" name="Rounded Rectangle 19"/>
+          <p:cNvSpPr/>
+          <p:nvPr/>
+        </p:nvSpPr>
+        <p:spPr>
+          <a:xfrm>
+            <a:off x="7308057" y="2909829"/>
+            <a:ext cx="1859848" cy="351200"/>
+          </a:xfrm>
+          <a:prstGeom prst="roundRect">
+            <a:avLst>
+              <a:gd name="adj" fmla="val 50000"/>
+            </a:avLst>
+          </a:prstGeom>
+          <a:solidFill>
+            <a:srgbClr val="FFF8E1"/>
+          </a:solidFill>
+          <a:ln w="15875">
+            <a:solidFill>
+              <a:srgbClr val="BF8F00"/>
+            </a:solidFill>
+          </a:ln>
+          <a:effectLst/>
+        </p:spPr>
+        <p:style>
+          <a:lnRef idx="1">
+            <a:schemeClr val="accent1"/>
+          </a:lnRef>
+          <a:fillRef idx="3">
+            <a:schemeClr val="accent1"/>
+          </a:fillRef>
+          <a:effectRef idx="2">
+            <a:schemeClr val="accent1"/>
+          </a:effectRef>
+          <a:fontRef idx="minor">
+            <a:schemeClr val="lt1"/>
+          </a:fontRef>
+        </p:style>
+        <p:txBody>
+          <a:bodyPr rtlCol="0" anchor="ctr" wrap="none" lIns="64000" rIns="64000" tIns="25400" bIns="25400"/>
+          <a:lstStyle/>
+          <a:p>
+            <a:pPr algn="ctr"/>
+            <a:r>
+              <a:rPr sz="1300" b="0">
+                <a:solidFill>
+                  <a:srgbClr val="000000"/>
+                </a:solidFill>
+                <a:latin typeface="Calibri"/>
+              </a:rPr>
+              <a:t>Chia 100 khoảng đều</a:t>
+            </a:r>
+          </a:p>
+        </p:txBody>
+      </p:sp>
+      <p:cxnSp>
+        <p:nvCxnSpPr>
+          <p:cNvPr id="21" name="Connector 20"/>
+          <p:cNvCxnSpPr/>
+          <p:nvPr/>
+        </p:nvCxnSpPr>
+        <p:spPr>
+          <a:xfrm>
+            <a:off x="6211214" y="2670962"/>
+            <a:ext cx="1139769" cy="840557"/>
+          </a:xfrm>
+          <a:prstGeom prst="line">
+            <a:avLst/>
+          </a:prstGeom>
+          <a:ln w="15875">
+            <a:solidFill>
+              <a:srgbClr val="BF8F00"/>
+            </a:solidFill>
+          </a:ln>
+        </p:spPr>
+        <p:style>
+          <a:lnRef idx="2">
+            <a:schemeClr val="accent1"/>
+          </a:lnRef>
+          <a:fillRef idx="0">
+            <a:schemeClr val="accent1"/>
+          </a:fillRef>
+          <a:effectRef idx="1">
+            <a:schemeClr val="accent1"/>
+          </a:effectRef>
+          <a:fontRef idx="minor">
+            <a:schemeClr val="tx1"/>
+          </a:fontRef>
+        </p:style>
+      </p:cxnSp>
+      <p:sp>
+        <p:nvSpPr>
+          <p:cNvPr id="22" name="Rounded Rectangle 21"/>
+          <p:cNvSpPr/>
+          <p:nvPr/>
+        </p:nvSpPr>
+        <p:spPr>
+          <a:xfrm>
+            <a:off x="7350983" y="3335919"/>
+            <a:ext cx="1773996" cy="351200"/>
+          </a:xfrm>
+          <a:prstGeom prst="roundRect">
+            <a:avLst>
+              <a:gd name="adj" fmla="val 50000"/>
+            </a:avLst>
+          </a:prstGeom>
+          <a:solidFill>
+            <a:srgbClr val="FFF8E1"/>
+          </a:solidFill>
+          <a:ln w="15875">
+            <a:solidFill>
+              <a:srgbClr val="BF8F00"/>
+            </a:solidFill>
+          </a:ln>
+          <a:effectLst/>
+        </p:spPr>
+        <p:style>
+          <a:lnRef idx="1">
+            <a:schemeClr val="accent1"/>
+          </a:lnRef>
+          <a:fillRef idx="3">
+            <a:schemeClr val="accent1"/>
+          </a:fillRef>
+          <a:effectRef idx="2">
+            <a:schemeClr val="accent1"/>
+          </a:effectRef>
+          <a:fontRef idx="minor">
+            <a:schemeClr val="lt1"/>
+          </a:fontRef>
+        </p:style>
+        <p:txBody>
+          <a:bodyPr rtlCol="0" anchor="ctr" wrap="none" lIns="64000" rIns="64000" tIns="25400" bIns="25400"/>
+          <a:lstStyle/>
+          <a:p>
+            <a:pPr algn="ctr"/>
+            <a:r>
+              <a:rPr sz="1300" b="0">
+                <a:solidFill>
+                  <a:srgbClr val="000000"/>
+                </a:solidFill>
+                <a:latin typeface="Calibri"/>
+              </a:rPr>
+              <a:t>Thiết bị hàng ngày</a:t>
+            </a:r>
+          </a:p>
+        </p:txBody>
+      </p:sp>
+      <p:sp>
+        <p:nvSpPr>
+          <p:cNvPr id="23" name="Oval 22"/>
+          <p:cNvSpPr/>
+          <p:nvPr/>
+        </p:nvSpPr>
+        <p:spPr>
+          <a:xfrm>
+            <a:off x="5056753" y="2259078"/>
+            <a:ext cx="2308920" cy="823767"/>
+          </a:xfrm>
+          <a:prstGeom prst="ellipse">
+            <a:avLst/>
+          </a:prstGeom>
+          <a:solidFill>
+            <a:srgbClr val="FFF2CC"/>
+          </a:solidFill>
+          <a:ln w="31750">
+            <a:solidFill>
+              <a:srgbClr val="BF8F00"/>
+            </a:solidFill>
+          </a:ln>
+          <a:effectLst/>
+        </p:spPr>
+        <p:style>
+          <a:lnRef idx="1">
+            <a:schemeClr val="accent1"/>
+          </a:lnRef>
+          <a:fillRef idx="3">
+            <a:schemeClr val="accent1"/>
+          </a:fillRef>
+          <a:effectRef idx="2">
+            <a:schemeClr val="accent1"/>
+          </a:effectRef>
+          <a:fontRef idx="minor">
+            <a:schemeClr val="lt1"/>
+          </a:fontRef>
+        </p:style>
+        <p:txBody>
+          <a:bodyPr rtlCol="0" anchor="ctr" wrap="none" lIns="64000" rIns="64000" tIns="25400" bIns="25400"/>
+          <a:lstStyle/>
+          <a:p>
+            <a:pPr algn="ctr"/>
+            <a:r>
+              <a:rPr sz="1500" b="1">
+                <a:solidFill>
+                  <a:srgbClr val="000000"/>
+                </a:solidFill>
+                <a:latin typeface="Calibri"/>
+              </a:rPr>
+              <a:t>② Thang Celsius</a:t>
+            </a:r>
+          </a:p>
+          <a:p>
+            <a:pPr algn="ctr"/>
+            <a:r>
+              <a:rPr sz="1500" b="1">
+                <a:solidFill>
+                  <a:srgbClr val="000000"/>
+                </a:solidFill>
+                <a:latin typeface="Calibri"/>
+              </a:rPr>
+              <a:t>(°C)</a:t>
+            </a:r>
+          </a:p>
+        </p:txBody>
+      </p:sp>
+      <p:cxnSp>
+        <p:nvCxnSpPr>
+          <p:cNvPr id="24" name="Connector 23"/>
+          <p:cNvCxnSpPr/>
+          <p:nvPr/>
+        </p:nvCxnSpPr>
+        <p:spPr>
+          <a:xfrm flipH="1">
+            <a:off x="3508857" y="3954780"/>
+            <a:ext cx="1351179" cy="1283817"/>
+          </a:xfrm>
+          <a:prstGeom prst="line">
+            <a:avLst/>
+          </a:prstGeom>
+          <a:ln w="44450">
+            <a:solidFill>
+              <a:srgbClr val="2F5597"/>
+            </a:solidFill>
+          </a:ln>
+        </p:spPr>
+        <p:style>
+          <a:lnRef idx="2">
+            <a:schemeClr val="accent1"/>
+          </a:lnRef>
+          <a:fillRef idx="0">
+            <a:schemeClr val="accent1"/>
+          </a:fillRef>
+          <a:effectRef idx="1">
+            <a:schemeClr val="accent1"/>
+          </a:effectRef>
+          <a:fontRef idx="minor">
+            <a:schemeClr val="tx1"/>
+          </a:fontRef>
+        </p:style>
+      </p:cxnSp>
+      <p:cxnSp>
+        <p:nvCxnSpPr>
+          <p:cNvPr id="25" name="Connector 24"/>
+          <p:cNvCxnSpPr/>
+          <p:nvPr/>
+        </p:nvCxnSpPr>
+        <p:spPr>
+          <a:xfrm flipH="1" flipV="1">
+            <a:off x="2243612" y="4398040"/>
+            <a:ext cx="1265245" cy="840557"/>
+          </a:xfrm>
+          <a:prstGeom prst="line">
+            <a:avLst/>
+          </a:prstGeom>
+          <a:ln w="15875">
+            <a:solidFill>
+              <a:srgbClr val="2F5597"/>
+            </a:solidFill>
+          </a:ln>
+        </p:spPr>
+        <p:style>
+          <a:lnRef idx="2">
+            <a:schemeClr val="accent1"/>
+          </a:lnRef>
+          <a:fillRef idx="0">
+            <a:schemeClr val="accent1"/>
+          </a:fillRef>
+          <a:effectRef idx="1">
+            <a:schemeClr val="accent1"/>
+          </a:effectRef>
+          <a:fontRef idx="minor">
+            <a:schemeClr val="tx1"/>
+          </a:fontRef>
+        </p:style>
+      </p:cxnSp>
+      <p:sp>
+        <p:nvSpPr>
+          <p:cNvPr id="26" name="Rounded Rectangle 25"/>
+          <p:cNvSpPr/>
+          <p:nvPr/>
+        </p:nvSpPr>
+        <p:spPr>
+          <a:xfrm>
+            <a:off x="720567" y="4121729"/>
+            <a:ext cx="1523044" cy="552622"/>
+          </a:xfrm>
+          <a:prstGeom prst="roundRect">
+            <a:avLst>
+              <a:gd name="adj" fmla="val 50000"/>
+            </a:avLst>
+          </a:prstGeom>
+          <a:solidFill>
+            <a:srgbClr val="E3EEF9"/>
+          </a:solidFill>
+          <a:ln w="15875">
+            <a:solidFill>
+              <a:srgbClr val="2F5597"/>
+            </a:solidFill>
+          </a:ln>
+          <a:effectLst/>
+        </p:spPr>
+        <p:style>
+          <a:lnRef idx="1">
+            <a:schemeClr val="accent1"/>
+          </a:lnRef>
+          <a:fillRef idx="3">
+            <a:schemeClr val="accent1"/>
+          </a:fillRef>
+          <a:effectRef idx="2">
+            <a:schemeClr val="accent1"/>
+          </a:effectRef>
+          <a:fontRef idx="minor">
+            <a:schemeClr val="lt1"/>
+          </a:fontRef>
+        </p:style>
+        <p:txBody>
+          <a:bodyPr rtlCol="0" anchor="ctr" wrap="none" lIns="64000" rIns="64000" tIns="25400" bIns="25400"/>
+          <a:lstStyle/>
+          <a:p>
+            <a:pPr algn="ctr"/>
+            <a:r>
+              <a:rPr sz="1300" b="1">
+                <a:solidFill>
+                  <a:srgbClr val="8B0000"/>
+                </a:solidFill>
+                <a:latin typeface="Calibri"/>
+              </a:rPr>
+              <a:t>T(K) = t(°C) +</a:t>
+            </a:r>
+          </a:p>
+          <a:p>
+            <a:pPr algn="ctr"/>
+            <a:r>
+              <a:rPr sz="1300" b="1">
+                <a:solidFill>
+                  <a:srgbClr val="8B0000"/>
+                </a:solidFill>
+                <a:latin typeface="Calibri"/>
+              </a:rPr>
+              <a:t>273</a:t>
+            </a:r>
+          </a:p>
+        </p:txBody>
+      </p:sp>
+      <p:cxnSp>
+        <p:nvCxnSpPr>
+          <p:cNvPr id="27" name="Connector 26"/>
+          <p:cNvCxnSpPr/>
+          <p:nvPr/>
+        </p:nvCxnSpPr>
+        <p:spPr>
+          <a:xfrm flipH="1" flipV="1">
+            <a:off x="2326162" y="5025552"/>
+            <a:ext cx="1182695" cy="213045"/>
+          </a:xfrm>
+          <a:prstGeom prst="line">
+            <a:avLst/>
+          </a:prstGeom>
+          <a:ln w="15875">
+            <a:solidFill>
+              <a:srgbClr val="2F5597"/>
+            </a:solidFill>
+          </a:ln>
+        </p:spPr>
+        <p:style>
+          <a:lnRef idx="2">
+            <a:schemeClr val="accent1"/>
+          </a:lnRef>
+          <a:fillRef idx="0">
+            <a:schemeClr val="accent1"/>
+          </a:fillRef>
+          <a:effectRef idx="1">
+            <a:schemeClr val="accent1"/>
+          </a:effectRef>
+          <a:fontRef idx="minor">
+            <a:schemeClr val="tx1"/>
+          </a:fontRef>
+        </p:style>
+      </p:cxnSp>
+      <p:sp>
+        <p:nvSpPr>
+          <p:cNvPr id="28" name="Rounded Rectangle 27"/>
+          <p:cNvSpPr/>
+          <p:nvPr/>
+        </p:nvSpPr>
+        <p:spPr>
+          <a:xfrm>
+            <a:off x="638017" y="4749241"/>
+            <a:ext cx="1688144" cy="552622"/>
+          </a:xfrm>
+          <a:prstGeom prst="roundRect">
+            <a:avLst>
+              <a:gd name="adj" fmla="val 50000"/>
+            </a:avLst>
+          </a:prstGeom>
+          <a:solidFill>
+            <a:srgbClr val="E3EEF9"/>
+          </a:solidFill>
+          <a:ln w="15875">
+            <a:solidFill>
+              <a:srgbClr val="2F5597"/>
+            </a:solidFill>
+          </a:ln>
+          <a:effectLst/>
+        </p:spPr>
+        <p:style>
+          <a:lnRef idx="1">
+            <a:schemeClr val="accent1"/>
+          </a:lnRef>
+          <a:fillRef idx="3">
+            <a:schemeClr val="accent1"/>
+          </a:fillRef>
+          <a:effectRef idx="2">
+            <a:schemeClr val="accent1"/>
+          </a:effectRef>
+          <a:fontRef idx="minor">
+            <a:schemeClr val="lt1"/>
+          </a:fontRef>
+        </p:style>
+        <p:txBody>
+          <a:bodyPr rtlCol="0" anchor="ctr" wrap="none" lIns="64000" rIns="64000" tIns="25400" bIns="25400"/>
+          <a:lstStyle/>
+          <a:p>
+            <a:pPr algn="ctr"/>
+            <a:r>
+              <a:rPr sz="1300" b="0">
+                <a:solidFill>
+                  <a:srgbClr val="000000"/>
+                </a:solidFill>
+                <a:latin typeface="Calibri"/>
+              </a:rPr>
+              <a:t>0 K = −273°C</a:t>
+            </a:r>
+          </a:p>
+          <a:p>
+            <a:pPr algn="ctr"/>
+            <a:r>
+              <a:rPr sz="1300" b="0">
+                <a:solidFill>
+                  <a:srgbClr val="000000"/>
+                </a:solidFill>
+                <a:latin typeface="Calibri"/>
+              </a:rPr>
+              <a:t>(không tuyệt đối)</a:t>
+            </a:r>
+          </a:p>
+        </p:txBody>
+      </p:sp>
+      <p:cxnSp>
+        <p:nvCxnSpPr>
+          <p:cNvPr id="29" name="Connector 28"/>
+          <p:cNvCxnSpPr/>
+          <p:nvPr/>
+        </p:nvCxnSpPr>
+        <p:spPr>
+          <a:xfrm flipH="1">
+            <a:off x="2326162" y="5238597"/>
+            <a:ext cx="1182695" cy="414467"/>
+          </a:xfrm>
+          <a:prstGeom prst="line">
+            <a:avLst/>
+          </a:prstGeom>
+          <a:ln w="15875">
+            <a:solidFill>
+              <a:srgbClr val="2F5597"/>
+            </a:solidFill>
+          </a:ln>
+        </p:spPr>
+        <p:style>
+          <a:lnRef idx="2">
+            <a:schemeClr val="accent1"/>
+          </a:lnRef>
+          <a:fillRef idx="0">
+            <a:schemeClr val="accent1"/>
+          </a:fillRef>
+          <a:effectRef idx="1">
+            <a:schemeClr val="accent1"/>
+          </a:effectRef>
+          <a:fontRef idx="minor">
+            <a:schemeClr val="tx1"/>
+          </a:fontRef>
+        </p:style>
+      </p:cxnSp>
+      <p:sp>
+        <p:nvSpPr>
+          <p:cNvPr id="30" name="Rounded Rectangle 29"/>
+          <p:cNvSpPr/>
+          <p:nvPr/>
+        </p:nvSpPr>
+        <p:spPr>
+          <a:xfrm>
+            <a:off x="638017" y="5376753"/>
+            <a:ext cx="1688144" cy="552622"/>
+          </a:xfrm>
+          <a:prstGeom prst="roundRect">
+            <a:avLst>
+              <a:gd name="adj" fmla="val 50000"/>
+            </a:avLst>
+          </a:prstGeom>
+          <a:solidFill>
+            <a:srgbClr val="E3EEF9"/>
+          </a:solidFill>
+          <a:ln w="15875">
+            <a:solidFill>
+              <a:srgbClr val="2F5597"/>
+            </a:solidFill>
+          </a:ln>
+          <a:effectLst/>
+        </p:spPr>
+        <p:style>
+          <a:lnRef idx="1">
+            <a:schemeClr val="accent1"/>
+          </a:lnRef>
+          <a:fillRef idx="3">
+            <a:schemeClr val="accent1"/>
+          </a:fillRef>
+          <a:effectRef idx="2">
+            <a:schemeClr val="accent1"/>
+          </a:effectRef>
+          <a:fontRef idx="minor">
+            <a:schemeClr val="lt1"/>
+          </a:fontRef>
+        </p:style>
+        <p:txBody>
+          <a:bodyPr rtlCol="0" anchor="ctr" wrap="none" lIns="64000" rIns="64000" tIns="25400" bIns="25400"/>
+          <a:lstStyle/>
+          <a:p>
+            <a:pPr algn="ctr"/>
+            <a:r>
+              <a:rPr sz="1300" b="0">
+                <a:solidFill>
+                  <a:srgbClr val="000000"/>
+                </a:solidFill>
+                <a:latin typeface="Calibri"/>
+              </a:rPr>
+              <a:t>Không có nhiệt độ</a:t>
+            </a:r>
+          </a:p>
+          <a:p>
+            <a:pPr algn="ctr"/>
+            <a:r>
+              <a:rPr sz="1300" b="0">
+                <a:solidFill>
+                  <a:srgbClr val="000000"/>
+                </a:solidFill>
+                <a:latin typeface="Calibri"/>
+              </a:rPr>
+              <a:t>âm</a:t>
+            </a:r>
+          </a:p>
+        </p:txBody>
+      </p:sp>
+      <p:cxnSp>
+        <p:nvCxnSpPr>
+          <p:cNvPr id="31" name="Connector 30"/>
+          <p:cNvCxnSpPr/>
+          <p:nvPr/>
+        </p:nvCxnSpPr>
+        <p:spPr>
+          <a:xfrm flipH="1">
+            <a:off x="2326162" y="5238597"/>
+            <a:ext cx="1182695" cy="941268"/>
+          </a:xfrm>
+          <a:prstGeom prst="line">
+            <a:avLst/>
+          </a:prstGeom>
+          <a:ln w="15875">
+            <a:solidFill>
+              <a:srgbClr val="2F5597"/>
+            </a:solidFill>
+          </a:ln>
+        </p:spPr>
+        <p:style>
+          <a:lnRef idx="2">
+            <a:schemeClr val="accent1"/>
+          </a:lnRef>
+          <a:fillRef idx="0">
+            <a:schemeClr val="accent1"/>
+          </a:fillRef>
+          <a:effectRef idx="1">
+            <a:schemeClr val="accent1"/>
+          </a:effectRef>
+          <a:fontRef idx="minor">
+            <a:schemeClr val="tx1"/>
+          </a:fontRef>
+        </p:style>
+      </p:cxnSp>
+      <p:sp>
+        <p:nvSpPr>
+          <p:cNvPr id="32" name="Rounded Rectangle 31"/>
+          <p:cNvSpPr/>
+          <p:nvPr/>
+        </p:nvSpPr>
+        <p:spPr>
+          <a:xfrm>
+            <a:off x="638017" y="6004265"/>
+            <a:ext cx="1688144" cy="351200"/>
+          </a:xfrm>
+          <a:prstGeom prst="roundRect">
+            <a:avLst>
+              <a:gd name="adj" fmla="val 50000"/>
+            </a:avLst>
+          </a:prstGeom>
+          <a:solidFill>
+            <a:srgbClr val="E3EEF9"/>
+          </a:solidFill>
+          <a:ln w="15875">
+            <a:solidFill>
+              <a:srgbClr val="2F5597"/>
+            </a:solidFill>
+          </a:ln>
+          <a:effectLst/>
+        </p:spPr>
+        <p:style>
+          <a:lnRef idx="1">
+            <a:schemeClr val="accent1"/>
+          </a:lnRef>
+          <a:fillRef idx="3">
+            <a:schemeClr val="accent1"/>
+          </a:fillRef>
+          <a:effectRef idx="2">
+            <a:schemeClr val="accent1"/>
+          </a:effectRef>
+          <a:fontRef idx="minor">
+            <a:schemeClr val="lt1"/>
+          </a:fontRef>
+        </p:style>
+        <p:txBody>
+          <a:bodyPr rtlCol="0" anchor="ctr" wrap="none" lIns="64000" rIns="64000" tIns="25400" bIns="25400"/>
+          <a:lstStyle/>
+          <a:p>
+            <a:pPr algn="ctr"/>
+            <a:r>
+              <a:rPr sz="1300" b="0">
+                <a:solidFill>
+                  <a:srgbClr val="000000"/>
+                </a:solidFill>
+                <a:latin typeface="Calibri"/>
+              </a:rPr>
+              <a:t>Dùng trong vật lí</a:t>
+            </a:r>
+          </a:p>
+        </p:txBody>
+      </p:sp>
+      <p:sp>
+        <p:nvSpPr>
+          <p:cNvPr id="33" name="Oval 32"/>
+          <p:cNvSpPr/>
+          <p:nvPr/>
+        </p:nvSpPr>
+        <p:spPr>
+          <a:xfrm>
+            <a:off x="2354397" y="4658216"/>
+            <a:ext cx="2308920" cy="1160762"/>
+          </a:xfrm>
+          <a:prstGeom prst="ellipse">
+            <a:avLst/>
+          </a:prstGeom>
+          <a:solidFill>
+            <a:srgbClr val="E2EFDA"/>
+          </a:solidFill>
+          <a:ln w="31750">
+            <a:solidFill>
+              <a:srgbClr val="375623"/>
+            </a:solidFill>
+          </a:ln>
+          <a:effectLst/>
+        </p:spPr>
+        <p:style>
+          <a:lnRef idx="1">
+            <a:schemeClr val="accent1"/>
+          </a:lnRef>
+          <a:fillRef idx="3">
+            <a:schemeClr val="accent1"/>
+          </a:fillRef>
+          <a:effectRef idx="2">
+            <a:schemeClr val="accent1"/>
+          </a:effectRef>
+          <a:fontRef idx="minor">
+            <a:schemeClr val="lt1"/>
+          </a:fontRef>
+        </p:style>
+        <p:txBody>
+          <a:bodyPr rtlCol="0" anchor="ctr" wrap="none" lIns="64000" rIns="64000" tIns="25400" bIns="25400"/>
+          <a:lstStyle/>
+          <a:p>
+            <a:pPr algn="ctr"/>
+            <a:r>
+              <a:rPr sz="1500" b="1">
+                <a:solidFill>
+                  <a:srgbClr val="000000"/>
+                </a:solidFill>
+                <a:latin typeface="Calibri"/>
+              </a:rPr>
+              <a:t>③ Thang Kelvin</a:t>
+            </a:r>
+          </a:p>
+          <a:p>
+            <a:pPr algn="ctr"/>
+            <a:r>
+              <a:rPr sz="1500" b="1">
+                <a:solidFill>
+                  <a:srgbClr val="000000"/>
+                </a:solidFill>
+                <a:latin typeface="Calibri"/>
+              </a:rPr>
+              <a:t>(K) Thang tuyệt</a:t>
+            </a:r>
+          </a:p>
+          <a:p>
+            <a:pPr algn="ctr"/>
+            <a:r>
+              <a:rPr sz="1500" b="1">
+                <a:solidFill>
+                  <a:srgbClr val="000000"/>
+                </a:solidFill>
+                <a:latin typeface="Calibri"/>
+              </a:rPr>
+              <a:t>đối</a:t>
+            </a:r>
+          </a:p>
+        </p:txBody>
+      </p:sp>
+      <p:cxnSp>
+        <p:nvCxnSpPr>
+          <p:cNvPr id="34" name="Connector 33"/>
+          <p:cNvCxnSpPr/>
+          <p:nvPr/>
+        </p:nvCxnSpPr>
+        <p:spPr>
+          <a:xfrm>
+            <a:off x="4860036" y="3954780"/>
+            <a:ext cx="1351178" cy="1283817"/>
+          </a:xfrm>
+          <a:prstGeom prst="line">
+            <a:avLst/>
+          </a:prstGeom>
+          <a:ln w="44450">
+            <a:solidFill>
+              <a:srgbClr val="7030A0"/>
+            </a:solidFill>
+          </a:ln>
+        </p:spPr>
+        <p:style>
+          <a:lnRef idx="2">
+            <a:schemeClr val="accent1"/>
+          </a:lnRef>
+          <a:fillRef idx="0">
+            <a:schemeClr val="accent1"/>
+          </a:fillRef>
+          <a:effectRef idx="1">
+            <a:schemeClr val="accent1"/>
+          </a:effectRef>
+          <a:fontRef idx="minor">
+            <a:schemeClr val="tx1"/>
+          </a:fontRef>
+        </p:style>
+      </p:cxnSp>
+      <p:cxnSp>
+        <p:nvCxnSpPr>
+          <p:cNvPr id="35" name="Connector 34"/>
+          <p:cNvCxnSpPr/>
+          <p:nvPr/>
+        </p:nvCxnSpPr>
+        <p:spPr>
+          <a:xfrm flipV="1">
+            <a:off x="6211214" y="4297329"/>
+            <a:ext cx="1096843" cy="941268"/>
+          </a:xfrm>
+          <a:prstGeom prst="line">
+            <a:avLst/>
+          </a:prstGeom>
+          <a:ln w="15875">
+            <a:solidFill>
+              <a:srgbClr val="7030A0"/>
+            </a:solidFill>
+          </a:ln>
+        </p:spPr>
+        <p:style>
+          <a:lnRef idx="2">
+            <a:schemeClr val="accent1"/>
+          </a:lnRef>
+          <a:fillRef idx="0">
+            <a:schemeClr val="accent1"/>
+          </a:fillRef>
+          <a:effectRef idx="1">
+            <a:schemeClr val="accent1"/>
+          </a:effectRef>
+          <a:fontRef idx="minor">
+            <a:schemeClr val="tx1"/>
+          </a:fontRef>
+        </p:style>
+      </p:cxnSp>
+      <p:sp>
+        <p:nvSpPr>
+          <p:cNvPr id="36" name="Rounded Rectangle 35"/>
+          <p:cNvSpPr/>
+          <p:nvPr/>
+        </p:nvSpPr>
+        <p:spPr>
+          <a:xfrm>
+            <a:off x="7308057" y="4121729"/>
+            <a:ext cx="1859848" cy="351200"/>
+          </a:xfrm>
+          <a:prstGeom prst="roundRect">
+            <a:avLst>
+              <a:gd name="adj" fmla="val 50000"/>
+            </a:avLst>
+          </a:prstGeom>
+          <a:solidFill>
+            <a:srgbClr val="F3E8F7"/>
+          </a:solidFill>
+          <a:ln w="15875">
+            <a:solidFill>
+              <a:srgbClr val="7030A0"/>
+            </a:solidFill>
+          </a:ln>
+          <a:effectLst/>
+        </p:spPr>
+        <p:style>
+          <a:lnRef idx="1">
+            <a:schemeClr val="accent1"/>
+          </a:lnRef>
+          <a:fillRef idx="3">
+            <a:schemeClr val="accent1"/>
+          </a:fillRef>
+          <a:effectRef idx="2">
+            <a:schemeClr val="accent1"/>
+          </a:effectRef>
+          <a:fontRef idx="minor">
+            <a:schemeClr val="lt1"/>
+          </a:fontRef>
+        </p:style>
+        <p:txBody>
+          <a:bodyPr rtlCol="0" anchor="ctr" wrap="none" lIns="64000" rIns="64000" tIns="25400" bIns="25400"/>
+          <a:lstStyle/>
+          <a:p>
+            <a:pPr algn="ctr"/>
+            <a:r>
+              <a:rPr sz="1300" b="0">
+                <a:solidFill>
+                  <a:srgbClr val="000000"/>
+                </a:solidFill>
+                <a:latin typeface="Calibri"/>
+              </a:rPr>
+              <a:t>Nhiệt kế hồng ngoại</a:t>
+            </a:r>
+          </a:p>
+        </p:txBody>
+      </p:sp>
+      <p:cxnSp>
+        <p:nvCxnSpPr>
+          <p:cNvPr id="37" name="Connector 36"/>
+          <p:cNvCxnSpPr/>
+          <p:nvPr/>
+        </p:nvCxnSpPr>
+        <p:spPr>
+          <a:xfrm flipV="1">
+            <a:off x="6211214" y="4824130"/>
+            <a:ext cx="1182695" cy="414467"/>
+          </a:xfrm>
+          <a:prstGeom prst="line">
+            <a:avLst/>
+          </a:prstGeom>
+          <a:ln w="15875">
+            <a:solidFill>
+              <a:srgbClr val="7030A0"/>
+            </a:solidFill>
+          </a:ln>
+        </p:spPr>
+        <p:style>
+          <a:lnRef idx="2">
+            <a:schemeClr val="accent1"/>
+          </a:lnRef>
+          <a:fillRef idx="0">
+            <a:schemeClr val="accent1"/>
+          </a:fillRef>
+          <a:effectRef idx="1">
+            <a:schemeClr val="accent1"/>
+          </a:effectRef>
+          <a:fontRef idx="minor">
+            <a:schemeClr val="tx1"/>
+          </a:fontRef>
+        </p:style>
+      </p:cxnSp>
+      <p:sp>
+        <p:nvSpPr>
+          <p:cNvPr id="38" name="Rounded Rectangle 37"/>
+          <p:cNvSpPr/>
+          <p:nvPr/>
+        </p:nvSpPr>
+        <p:spPr>
+          <a:xfrm>
+            <a:off x="7393909" y="4547819"/>
+            <a:ext cx="1688144" cy="552622"/>
+          </a:xfrm>
+          <a:prstGeom prst="roundRect">
+            <a:avLst>
+              <a:gd name="adj" fmla="val 50000"/>
+            </a:avLst>
+          </a:prstGeom>
+          <a:solidFill>
+            <a:srgbClr val="F3E8F7"/>
+          </a:solidFill>
+          <a:ln w="15875">
+            <a:solidFill>
+              <a:srgbClr val="7030A0"/>
+            </a:solidFill>
+          </a:ln>
+          <a:effectLst/>
+        </p:spPr>
+        <p:style>
+          <a:lnRef idx="1">
+            <a:schemeClr val="accent1"/>
+          </a:lnRef>
+          <a:fillRef idx="3">
+            <a:schemeClr val="accent1"/>
+          </a:fillRef>
+          <a:effectRef idx="2">
+            <a:schemeClr val="accent1"/>
+          </a:effectRef>
+          <a:fontRef idx="minor">
+            <a:schemeClr val="lt1"/>
+          </a:fontRef>
+        </p:style>
+        <p:txBody>
+          <a:bodyPr rtlCol="0" anchor="ctr" wrap="none" lIns="64000" rIns="64000" tIns="25400" bIns="25400"/>
+          <a:lstStyle/>
+          <a:p>
+            <a:pPr algn="ctr"/>
+            <a:r>
+              <a:rPr sz="1300" b="0">
+                <a:solidFill>
+                  <a:srgbClr val="000000"/>
+                </a:solidFill>
+                <a:latin typeface="Calibri"/>
+              </a:rPr>
+              <a:t>Cảm biến nhiệt độ</a:t>
+            </a:r>
+          </a:p>
+          <a:p>
+            <a:pPr algn="ctr"/>
+            <a:r>
+              <a:rPr sz="1300" b="0">
+                <a:solidFill>
+                  <a:srgbClr val="000000"/>
+                </a:solidFill>
+                <a:latin typeface="Calibri"/>
+              </a:rPr>
+              <a:t>IC</a:t>
+            </a:r>
+          </a:p>
+        </p:txBody>
+      </p:sp>
+      <p:cxnSp>
+        <p:nvCxnSpPr>
+          <p:cNvPr id="39" name="Connector 38"/>
+          <p:cNvCxnSpPr/>
+          <p:nvPr/>
+        </p:nvCxnSpPr>
+        <p:spPr>
+          <a:xfrm>
+            <a:off x="6211214" y="5238597"/>
+            <a:ext cx="1268547" cy="213045"/>
+          </a:xfrm>
+          <a:prstGeom prst="line">
+            <a:avLst/>
+          </a:prstGeom>
+          <a:ln w="15875">
+            <a:solidFill>
+              <a:srgbClr val="7030A0"/>
+            </a:solidFill>
+          </a:ln>
+        </p:spPr>
+        <p:style>
+          <a:lnRef idx="2">
+            <a:schemeClr val="accent1"/>
+          </a:lnRef>
+          <a:fillRef idx="0">
+            <a:schemeClr val="accent1"/>
+          </a:fillRef>
+          <a:effectRef idx="1">
+            <a:schemeClr val="accent1"/>
+          </a:effectRef>
+          <a:fontRef idx="minor">
+            <a:schemeClr val="tx1"/>
+          </a:fontRef>
+        </p:style>
+      </p:cxnSp>
+      <p:sp>
+        <p:nvSpPr>
+          <p:cNvPr id="40" name="Rounded Rectangle 39"/>
+          <p:cNvSpPr/>
+          <p:nvPr/>
+        </p:nvSpPr>
+        <p:spPr>
+          <a:xfrm>
+            <a:off x="7479761" y="5175331"/>
+            <a:ext cx="1516440" cy="552622"/>
+          </a:xfrm>
+          <a:prstGeom prst="roundRect">
+            <a:avLst>
+              <a:gd name="adj" fmla="val 50000"/>
+            </a:avLst>
+          </a:prstGeom>
+          <a:solidFill>
+            <a:srgbClr val="F3E8F7"/>
+          </a:solidFill>
+          <a:ln w="15875">
+            <a:solidFill>
+              <a:srgbClr val="7030A0"/>
+            </a:solidFill>
+          </a:ln>
+          <a:effectLst/>
+        </p:spPr>
+        <p:style>
+          <a:lnRef idx="1">
+            <a:schemeClr val="accent1"/>
+          </a:lnRef>
+          <a:fillRef idx="3">
+            <a:schemeClr val="accent1"/>
+          </a:fillRef>
+          <a:effectRef idx="2">
+            <a:schemeClr val="accent1"/>
+          </a:effectRef>
+          <a:fontRef idx="minor">
+            <a:schemeClr val="lt1"/>
+          </a:fontRef>
+        </p:style>
+        <p:txBody>
+          <a:bodyPr rtlCol="0" anchor="ctr" wrap="none" lIns="64000" rIns="64000" tIns="25400" bIns="25400"/>
+          <a:lstStyle/>
+          <a:p>
+            <a:pPr algn="ctr"/>
+            <a:r>
+              <a:rPr sz="1300" b="0">
+                <a:solidFill>
+                  <a:srgbClr val="000000"/>
+                </a:solidFill>
+                <a:latin typeface="Calibri"/>
+              </a:rPr>
+              <a:t>Nhiệt độ cơ thể</a:t>
+            </a:r>
+          </a:p>
+          <a:p>
+            <a:pPr algn="ctr"/>
+            <a:r>
+              <a:rPr sz="1300" b="0">
+                <a:solidFill>
+                  <a:srgbClr val="000000"/>
+                </a:solidFill>
+                <a:latin typeface="Calibri"/>
+              </a:rPr>
+              <a:t>37°C = 310 K</a:t>
+            </a:r>
+          </a:p>
+        </p:txBody>
+      </p:sp>
+      <p:cxnSp>
+        <p:nvCxnSpPr>
+          <p:cNvPr id="41" name="Connector 40"/>
+          <p:cNvCxnSpPr/>
+          <p:nvPr/>
+        </p:nvCxnSpPr>
+        <p:spPr>
+          <a:xfrm>
+            <a:off x="6211214" y="5238597"/>
+            <a:ext cx="1172789" cy="840557"/>
+          </a:xfrm>
+          <a:prstGeom prst="line">
+            <a:avLst/>
+          </a:prstGeom>
+          <a:ln w="15875">
+            <a:solidFill>
+              <a:srgbClr val="7030A0"/>
+            </a:solidFill>
+          </a:ln>
+        </p:spPr>
+        <p:style>
+          <a:lnRef idx="2">
+            <a:schemeClr val="accent1"/>
+          </a:lnRef>
+          <a:fillRef idx="0">
+            <a:schemeClr val="accent1"/>
+          </a:fillRef>
+          <a:effectRef idx="1">
+            <a:schemeClr val="accent1"/>
+          </a:effectRef>
+          <a:fontRef idx="minor">
+            <a:schemeClr val="tx1"/>
+          </a:fontRef>
+        </p:style>
+      </p:cxnSp>
+      <p:sp>
+        <p:nvSpPr>
+          <p:cNvPr id="42" name="Rounded Rectangle 41"/>
+          <p:cNvSpPr/>
+          <p:nvPr/>
+        </p:nvSpPr>
+        <p:spPr>
+          <a:xfrm>
+            <a:off x="7384003" y="5802843"/>
+            <a:ext cx="1707956" cy="552622"/>
+          </a:xfrm>
+          <a:prstGeom prst="roundRect">
+            <a:avLst>
+              <a:gd name="adj" fmla="val 50000"/>
+            </a:avLst>
+          </a:prstGeom>
+          <a:solidFill>
+            <a:srgbClr val="F3E8F7"/>
+          </a:solidFill>
+          <a:ln w="15875">
+            <a:solidFill>
+              <a:srgbClr val="7030A0"/>
+            </a:solidFill>
+          </a:ln>
+          <a:effectLst/>
+        </p:spPr>
+        <p:style>
+          <a:lnRef idx="1">
+            <a:schemeClr val="accent1"/>
+          </a:lnRef>
+          <a:fillRef idx="3">
+            <a:schemeClr val="accent1"/>
+          </a:fillRef>
+          <a:effectRef idx="2">
+            <a:schemeClr val="accent1"/>
+          </a:effectRef>
+          <a:fontRef idx="minor">
+            <a:schemeClr val="lt1"/>
+          </a:fontRef>
+        </p:style>
+        <p:txBody>
+          <a:bodyPr rtlCol="0" anchor="ctr" wrap="none" lIns="64000" rIns="64000" tIns="25400" bIns="25400"/>
+          <a:lstStyle/>
+          <a:p>
+            <a:pPr algn="ctr"/>
+            <a:r>
+              <a:rPr sz="1300" b="1">
+                <a:solidFill>
+                  <a:srgbClr val="8B0000"/>
+                </a:solidFill>
+                <a:latin typeface="Calibri"/>
+              </a:rPr>
+              <a:t>T Tây Nguyên mùa</a:t>
+            </a:r>
+          </a:p>
+          <a:p>
+            <a:pPr algn="ctr"/>
+            <a:r>
+              <a:rPr sz="1300" b="1">
+                <a:solidFill>
+                  <a:srgbClr val="8B0000"/>
+                </a:solidFill>
+                <a:latin typeface="Calibri"/>
+              </a:rPr>
+              <a:t>khô ~35°C</a:t>
+            </a:r>
+          </a:p>
+        </p:txBody>
+      </p:sp>
+      <p:sp>
+        <p:nvSpPr>
+          <p:cNvPr id="43" name="Oval 42"/>
+          <p:cNvSpPr/>
+          <p:nvPr/>
+        </p:nvSpPr>
+        <p:spPr>
+          <a:xfrm>
+            <a:off x="5264779" y="4826713"/>
+            <a:ext cx="1892868" cy="823767"/>
+          </a:xfrm>
+          <a:prstGeom prst="ellipse">
+            <a:avLst/>
+          </a:prstGeom>
+          <a:solidFill>
+            <a:srgbClr val="FFF2CC"/>
+          </a:solidFill>
+          <a:ln w="31750">
+            <a:solidFill>
+              <a:srgbClr val="BF8F00"/>
+            </a:solidFill>
+          </a:ln>
+          <a:effectLst/>
+        </p:spPr>
+        <p:style>
+          <a:lnRef idx="1">
+            <a:schemeClr val="accent1"/>
+          </a:lnRef>
+          <a:fillRef idx="3">
+            <a:schemeClr val="accent1"/>
+          </a:fillRef>
+          <a:effectRef idx="2">
+            <a:schemeClr val="accent1"/>
+          </a:effectRef>
+          <a:fontRef idx="minor">
+            <a:schemeClr val="lt1"/>
+          </a:fontRef>
+        </p:style>
+        <p:txBody>
+          <a:bodyPr rtlCol="0" anchor="ctr" wrap="none" lIns="64000" rIns="64000" tIns="25400" bIns="25400"/>
+          <a:lstStyle/>
+          <a:p>
+            <a:pPr algn="ctr"/>
+            <a:r>
+              <a:rPr sz="1500" b="1">
+                <a:solidFill>
+                  <a:srgbClr val="000000"/>
+                </a:solidFill>
+                <a:latin typeface="Calibri"/>
+              </a:rPr>
+              <a:t>④ Đo nhiệt</a:t>
+            </a:r>
+          </a:p>
+          <a:p>
+            <a:pPr algn="ctr"/>
+            <a:r>
+              <a:rPr sz="1500" b="1">
+                <a:solidFill>
+                  <a:srgbClr val="000000"/>
+                </a:solidFill>
+                <a:latin typeface="Calibri"/>
+              </a:rPr>
+              <a:t>độ Thực tiễn</a:t>
+            </a:r>
+          </a:p>
+        </p:txBody>
+      </p:sp>
+      <p:sp>
+        <p:nvSpPr>
+          <p:cNvPr id="44" name="Oval 43"/>
+          <p:cNvSpPr/>
+          <p:nvPr/>
+        </p:nvSpPr>
+        <p:spPr>
+          <a:xfrm>
+            <a:off x="3566891" y="3484793"/>
+            <a:ext cx="2586288" cy="939972"/>
+          </a:xfrm>
+          <a:prstGeom prst="ellipse">
+            <a:avLst/>
+          </a:prstGeom>
+          <a:solidFill>
+            <a:srgbClr val="002060"/>
+          </a:solidFill>
+          <a:ln w="25400">
+            <a:solidFill>
+              <a:srgbClr val="000B1E"/>
+            </a:solidFill>
+          </a:ln>
+          <a:effectLst/>
+        </p:spPr>
+        <p:style>
+          <a:lnRef idx="1">
+            <a:schemeClr val="accent1"/>
+          </a:lnRef>
+          <a:fillRef idx="3">
+            <a:schemeClr val="accent1"/>
+          </a:fillRef>
+          <a:effectRef idx="2">
+            <a:schemeClr val="accent1"/>
+          </a:effectRef>
+          <a:fontRef idx="minor">
+            <a:schemeClr val="lt1"/>
+          </a:fontRef>
+        </p:style>
+        <p:txBody>
+          <a:bodyPr rtlCol="0" anchor="ctr" wrap="none" lIns="64000" rIns="64000" tIns="25400" bIns="25400"/>
+          <a:lstStyle/>
+          <a:p>
+            <a:pPr algn="ctr"/>
+            <a:r>
+              <a:rPr sz="1700" b="1">
+                <a:solidFill>
+                  <a:srgbClr val="FFFFFF"/>
+                </a:solidFill>
+                <a:latin typeface="Calibri"/>
+              </a:rPr>
+              <a:t>NHIỆT ĐỘ. THANG</a:t>
+            </a:r>
+          </a:p>
+          <a:p>
+            <a:pPr algn="ctr"/>
+            <a:r>
+              <a:rPr sz="1700" b="1">
+                <a:solidFill>
+                  <a:srgbClr val="FFFFFF"/>
+                </a:solidFill>
+                <a:latin typeface="Calibri"/>
+              </a:rPr>
+              <a:t>ĐO NHIỆT ĐỘ</a:t>
+            </a:r>
+          </a:p>
+        </p:txBody>
+      </p:sp>
     </p:spTree>
   </p:cSld>
   <p:clrMapOvr>
